--- a/dist/초2/음악·미술/리듬과가락/초2_음악·미술_리듬과가락_01_리듬과가락표현_학생용.pptx
+++ b/dist/초2/음악·미술/리듬과가락/초2_음악·미술_리듬과가락_01_리듬과가락표현_학생용.pptx
@@ -114,34 +114,34 @@
   <p:extLst>
     <p:ext uri="{521415D9-36F7-43E2-AB2F-B90AF26B5E84}">
       <p14:sectionLst xmlns:p14="http://schemas.microsoft.com/office/powerpoint/2010/main">
-        <p14:section name="도입" id="{e9c5aac1-c156-aabe-7f92-f7470e9a3ed5}">
+        <p14:section name="도입" id="{e56838a7-5d5a-f0f9-cac3-e123c294d9a7}">
           <p14:sldIdLst>
             <p14:sldId id="256"/>
             <p14:sldId id="257"/>
           </p14:sldIdLst>
         </p14:section>
-        <p14:section name="개념" id="{c8c487dc-fbf3-bafa-6551-1babaf6c0146}">
+        <p14:section name="개념" id="{52e2b20d-3d77-1aa0-c3b6-2ba48583ae36}">
           <p14:sldIdLst>
             <p14:sldId id="258"/>
           </p14:sldIdLst>
         </p14:section>
-        <p14:section name="연습" id="{250a5704-0029-6061-f50a-38d2e189f972}">
+        <p14:section name="연습" id="{8027d88a-0d0c-ee53-097d-9b7c77b498e7}">
           <p14:sldIdLst>
             <p14:sldId id="259"/>
             <p14:sldId id="260"/>
           </p14:sldIdLst>
         </p14:section>
-        <p14:section name="확인" id="{57db68e9-2aab-b3c9-c565-761c9fbb0990}">
+        <p14:section name="확인" id="{0d86a4bf-95e0-795c-1303-950e47cc3ca4}">
           <p14:sldIdLst>
             <p14:sldId id="261"/>
           </p14:sldIdLst>
         </p14:section>
-        <p14:section name="정리" id="{352f33c6-37f4-c2c8-5cce-535c717fec59}">
+        <p14:section name="정리" id="{052b1914-137e-ebc8-cd9b-3f18f3d03499}">
           <p14:sldIdLst>
             <p14:sldId id="262"/>
           </p14:sldIdLst>
         </p14:section>
-        <p14:section name="보충" id="{f690b69d-424d-8920-dbba-182c6f1c77cb}">
+        <p14:section name="보충" id="{76846923-7538-8cb3-2a43-642353dbc9b4}">
           <p14:sldIdLst>
             <p14:sldId id="263"/>
           </p14:sldIdLst>
